--- a/Игра “Змейка”.pptx
+++ b/Игра “Змейка”.pptx
@@ -1204,7 +1204,7 @@
   <p:cSld>
     <p:spTree>
       <p:nvGrpSpPr>
-        <p:cNvPr id="106" name="Shape 106"/>
+        <p:cNvPr id="107" name="Shape 107"/>
         <p:cNvGrpSpPr/>
         <p:nvPr/>
       </p:nvGrpSpPr>
@@ -1218,7 +1218,7 @@
       </p:grpSpPr>
       <p:sp>
         <p:nvSpPr>
-          <p:cNvPr id="107" name="Google Shape;107;g3e384b51214_2_29:notes"/>
+          <p:cNvPr id="108" name="Google Shape;108;g3e384b51214_2_29:notes"/>
           <p:cNvSpPr/>
           <p:nvPr>
             <p:ph idx="2" type="sldImg"/>
@@ -1253,7 +1253,7 @@
       </p:sp>
       <p:sp>
         <p:nvSpPr>
-          <p:cNvPr id="108" name="Google Shape;108;g3e384b51214_2_29:notes"/>
+          <p:cNvPr id="109" name="Google Shape;109;g3e384b51214_2_29:notes"/>
           <p:cNvSpPr txBox="1"/>
           <p:nvPr>
             <p:ph idx="1" type="body"/>
@@ -1303,7 +1303,7 @@
   <p:cSld>
     <p:spTree>
       <p:nvGrpSpPr>
-        <p:cNvPr id="118" name="Shape 118"/>
+        <p:cNvPr id="119" name="Shape 119"/>
         <p:cNvGrpSpPr/>
         <p:nvPr/>
       </p:nvGrpSpPr>
@@ -1317,7 +1317,7 @@
       </p:grpSpPr>
       <p:sp>
         <p:nvSpPr>
-          <p:cNvPr id="119" name="Google Shape;119;g3e384b51214_2_39:notes"/>
+          <p:cNvPr id="120" name="Google Shape;120;g3e384b51214_2_39:notes"/>
           <p:cNvSpPr/>
           <p:nvPr>
             <p:ph idx="2" type="sldImg"/>
@@ -1352,7 +1352,7 @@
       </p:sp>
       <p:sp>
         <p:nvSpPr>
-          <p:cNvPr id="120" name="Google Shape;120;g3e384b51214_2_39:notes"/>
+          <p:cNvPr id="121" name="Google Shape;121;g3e384b51214_2_39:notes"/>
           <p:cNvSpPr txBox="1"/>
           <p:nvPr>
             <p:ph idx="1" type="body"/>
@@ -1402,7 +1402,7 @@
   <p:cSld>
     <p:spTree>
       <p:nvGrpSpPr>
-        <p:cNvPr id="130" name="Shape 130"/>
+        <p:cNvPr id="131" name="Shape 131"/>
         <p:cNvGrpSpPr/>
         <p:nvPr/>
       </p:nvGrpSpPr>
@@ -1416,7 +1416,7 @@
       </p:grpSpPr>
       <p:sp>
         <p:nvSpPr>
-          <p:cNvPr id="131" name="Google Shape;131;g3e384b51214_2_44:notes"/>
+          <p:cNvPr id="132" name="Google Shape;132;g3e384b51214_2_44:notes"/>
           <p:cNvSpPr/>
           <p:nvPr>
             <p:ph idx="2" type="sldImg"/>
@@ -1451,7 +1451,7 @@
       </p:sp>
       <p:sp>
         <p:nvSpPr>
-          <p:cNvPr id="132" name="Google Shape;132;g3e384b51214_2_44:notes"/>
+          <p:cNvPr id="133" name="Google Shape;133;g3e384b51214_2_44:notes"/>
           <p:cNvSpPr txBox="1"/>
           <p:nvPr>
             <p:ph idx="1" type="body"/>
@@ -7034,7 +7034,7 @@
         </p:nvSpPr>
         <p:spPr>
           <a:xfrm>
-            <a:off x="504025" y="2087475"/>
+            <a:off x="514600" y="2087475"/>
             <a:ext cx="5726100" cy="2124000"/>
           </a:xfrm>
           <a:prstGeom prst="rect">
@@ -7051,7 +7051,7 @@
           </a:bodyPr>
           <a:lstStyle/>
           <a:p>
-            <a:pPr indent="0" lvl="0" marL="0" rtl="0" algn="l">
+            <a:pPr indent="0" lvl="0" marL="0" rtl="0" algn="just">
               <a:spcBef>
                 <a:spcPts val="0"/>
               </a:spcBef>
@@ -7124,7 +7124,7 @@
         </p:blipFill>
         <p:spPr>
           <a:xfrm>
-            <a:off x="6033275" y="2087474"/>
+            <a:off x="6454375" y="2087474"/>
             <a:ext cx="2371675" cy="2371650"/>
           </a:xfrm>
           <a:prstGeom prst="rect">
@@ -7258,7 +7258,7 @@
         </p:blipFill>
         <p:spPr>
           <a:xfrm>
-            <a:off x="6176475" y="921075"/>
+            <a:off x="6161225" y="857638"/>
             <a:ext cx="1254175" cy="1254175"/>
           </a:xfrm>
           <a:prstGeom prst="rect">
@@ -7360,7 +7360,7 @@
         </p:nvSpPr>
         <p:spPr>
           <a:xfrm>
-            <a:off x="861175" y="2374300"/>
+            <a:off x="861175" y="2465563"/>
             <a:ext cx="3543600" cy="538800"/>
           </a:xfrm>
           <a:prstGeom prst="rect">
@@ -7418,7 +7418,7 @@
         </p:nvSpPr>
         <p:spPr>
           <a:xfrm>
-            <a:off x="861175" y="2913100"/>
+            <a:off x="861175" y="3052675"/>
             <a:ext cx="6185100" cy="861900"/>
           </a:xfrm>
           <a:prstGeom prst="rect">
@@ -7484,7 +7484,7 @@
         </p:blipFill>
         <p:spPr>
           <a:xfrm>
-            <a:off x="6751825" y="2374298"/>
+            <a:off x="6762550" y="1968098"/>
             <a:ext cx="1899150" cy="1899150"/>
           </a:xfrm>
           <a:prstGeom prst="rect">
@@ -7512,8 +7512,8 @@
         </p:blipFill>
         <p:spPr>
           <a:xfrm>
-            <a:off x="3836888" y="3451900"/>
-            <a:ext cx="1563324" cy="1560675"/>
+            <a:off x="4105350" y="3582825"/>
+            <a:ext cx="1480550" cy="1478050"/>
           </a:xfrm>
           <a:prstGeom prst="rect">
             <a:avLst/>
@@ -7686,7 +7686,7 @@
           </a:bodyPr>
           <a:lstStyle/>
           <a:p>
-            <a:pPr indent="0" lvl="0" marL="0" rtl="0" algn="l">
+            <a:pPr indent="0" lvl="0" marL="0" rtl="0" algn="just">
               <a:spcBef>
                 <a:spcPts val="0"/>
               </a:spcBef>
@@ -7775,7 +7775,7 @@
         </p:blipFill>
         <p:spPr>
           <a:xfrm>
-            <a:off x="4426213" y="3589350"/>
+            <a:off x="4426213" y="3718200"/>
             <a:ext cx="4065568" cy="1242750"/>
           </a:xfrm>
           <a:prstGeom prst="rect">
@@ -7945,7 +7945,7 @@
           </a:bodyPr>
           <a:lstStyle/>
           <a:p>
-            <a:pPr indent="0" lvl="0" marL="0" rtl="0" algn="l">
+            <a:pPr indent="0" lvl="0" marL="0" rtl="0" algn="just">
               <a:spcBef>
                 <a:spcPts val="0"/>
               </a:spcBef>
@@ -8006,7 +8006,7 @@
         </p:blipFill>
         <p:spPr>
           <a:xfrm>
-            <a:off x="6714375" y="1725750"/>
+            <a:off x="4784700" y="316175"/>
             <a:ext cx="1933575" cy="723900"/>
           </a:xfrm>
           <a:prstGeom prst="rect">
@@ -8062,8 +8062,36 @@
         </p:blipFill>
         <p:spPr>
           <a:xfrm>
-            <a:off x="5525050" y="3009750"/>
+            <a:off x="4223300" y="3106238"/>
             <a:ext cx="2221541" cy="1665400"/>
+          </a:xfrm>
+          <a:prstGeom prst="rect">
+            <a:avLst/>
+          </a:prstGeom>
+          <a:noFill/>
+          <a:ln>
+            <a:noFill/>
+          </a:ln>
+        </p:spPr>
+      </p:pic>
+      <p:pic>
+        <p:nvPicPr>
+          <p:cNvPr id="106" name="Google Shape;106;p17" title="Снимок экрана 2026-05-23 191233.png"/>
+          <p:cNvPicPr preferRelativeResize="0"/>
+          <p:nvPr/>
+        </p:nvPicPr>
+        <p:blipFill>
+          <a:blip r:embed="rId6">
+            <a:alphaModFix/>
+          </a:blip>
+          <a:stretch>
+            <a:fillRect/>
+          </a:stretch>
+        </p:blipFill>
+        <p:spPr>
+          <a:xfrm>
+            <a:off x="6929925" y="1740225"/>
+            <a:ext cx="2072250" cy="1774030"/>
           </a:xfrm>
           <a:prstGeom prst="rect">
             <a:avLst/>
@@ -8087,7 +8115,7 @@
   <p:cSld>
     <p:spTree>
       <p:nvGrpSpPr>
-        <p:cNvPr id="109" name="Shape 109"/>
+        <p:cNvPr id="110" name="Shape 110"/>
         <p:cNvGrpSpPr/>
         <p:nvPr/>
       </p:nvGrpSpPr>
@@ -8101,7 +8129,7 @@
       </p:grpSpPr>
       <p:sp>
         <p:nvSpPr>
-          <p:cNvPr id="110" name="Google Shape;110;p18"/>
+          <p:cNvPr id="111" name="Google Shape;111;p18"/>
           <p:cNvSpPr txBox="1"/>
           <p:nvPr>
             <p:ph type="title"/>
@@ -8141,7 +8169,7 @@
       </p:sp>
       <p:sp>
         <p:nvSpPr>
-          <p:cNvPr id="111" name="Google Shape;111;p18"/>
+          <p:cNvPr id="112" name="Google Shape;112;p18"/>
           <p:cNvSpPr txBox="1"/>
           <p:nvPr>
             <p:ph idx="1" type="body"/>
@@ -8181,13 +8209,13 @@
       </p:sp>
       <p:sp>
         <p:nvSpPr>
-          <p:cNvPr id="112" name="Google Shape;112;p18"/>
+          <p:cNvPr id="113" name="Google Shape;113;p18"/>
           <p:cNvSpPr txBox="1"/>
           <p:nvPr/>
         </p:nvSpPr>
         <p:spPr>
           <a:xfrm>
-            <a:off x="565800" y="1328775"/>
+            <a:off x="565800" y="1430300"/>
             <a:ext cx="7097700" cy="492600"/>
           </a:xfrm>
           <a:prstGeom prst="rect">
@@ -8244,13 +8272,13 @@
       </p:sp>
       <p:sp>
         <p:nvSpPr>
-          <p:cNvPr id="113" name="Google Shape;113;p18"/>
+          <p:cNvPr id="114" name="Google Shape;114;p18"/>
           <p:cNvSpPr txBox="1"/>
           <p:nvPr/>
         </p:nvSpPr>
         <p:spPr>
           <a:xfrm>
-            <a:off x="635550" y="1873988"/>
+            <a:off x="635550" y="1992088"/>
             <a:ext cx="6958200" cy="800400"/>
           </a:xfrm>
           <a:prstGeom prst="rect">
@@ -8326,7 +8354,7 @@
       </p:sp>
       <p:pic>
         <p:nvPicPr>
-          <p:cNvPr id="114" name="Google Shape;114;p18" title="муха.png"/>
+          <p:cNvPr id="115" name="Google Shape;115;p18" title="муха.png"/>
           <p:cNvPicPr preferRelativeResize="0"/>
           <p:nvPr/>
         </p:nvPicPr>
@@ -8354,13 +8382,13 @@
       </p:pic>
       <p:sp>
         <p:nvSpPr>
-          <p:cNvPr id="115" name="Google Shape;115;p18"/>
+          <p:cNvPr id="116" name="Google Shape;116;p18"/>
           <p:cNvSpPr txBox="1"/>
           <p:nvPr/>
         </p:nvSpPr>
         <p:spPr>
           <a:xfrm>
-            <a:off x="635550" y="2709463"/>
+            <a:off x="635550" y="2847100"/>
             <a:ext cx="6172200" cy="492600"/>
           </a:xfrm>
           <a:prstGeom prst="rect">
@@ -8412,7 +8440,7 @@
       </p:sp>
       <p:pic>
         <p:nvPicPr>
-          <p:cNvPr id="116" name="Google Shape;116;p18" title="загруженное (18).jpg"/>
+          <p:cNvPr id="117" name="Google Shape;117;p18" title="загруженное (18).jpg"/>
           <p:cNvPicPr preferRelativeResize="0"/>
           <p:nvPr/>
         </p:nvPicPr>
@@ -8440,13 +8468,13 @@
       </p:pic>
       <p:sp>
         <p:nvSpPr>
-          <p:cNvPr id="117" name="Google Shape;117;p18"/>
+          <p:cNvPr id="118" name="Google Shape;118;p18"/>
           <p:cNvSpPr txBox="1"/>
           <p:nvPr/>
         </p:nvSpPr>
         <p:spPr>
           <a:xfrm>
-            <a:off x="635550" y="3202075"/>
+            <a:off x="635550" y="3394325"/>
             <a:ext cx="5884500" cy="800400"/>
           </a:xfrm>
           <a:prstGeom prst="rect">
@@ -8509,7 +8537,7 @@
   <p:cSld>
     <p:spTree>
       <p:nvGrpSpPr>
-        <p:cNvPr id="121" name="Shape 121"/>
+        <p:cNvPr id="122" name="Shape 122"/>
         <p:cNvGrpSpPr/>
         <p:nvPr/>
       </p:nvGrpSpPr>
@@ -8523,7 +8551,7 @@
       </p:grpSpPr>
       <p:sp>
         <p:nvSpPr>
-          <p:cNvPr id="122" name="Google Shape;122;p19"/>
+          <p:cNvPr id="123" name="Google Shape;123;p19"/>
           <p:cNvSpPr txBox="1"/>
           <p:nvPr>
             <p:ph type="title"/>
@@ -8563,7 +8591,7 @@
       </p:sp>
       <p:sp>
         <p:nvSpPr>
-          <p:cNvPr id="123" name="Google Shape;123;p19"/>
+          <p:cNvPr id="124" name="Google Shape;124;p19"/>
           <p:cNvSpPr txBox="1"/>
           <p:nvPr>
             <p:ph idx="1" type="body"/>
@@ -8603,13 +8631,13 @@
       </p:sp>
       <p:sp>
         <p:nvSpPr>
-          <p:cNvPr id="124" name="Google Shape;124;p19"/>
+          <p:cNvPr id="125" name="Google Shape;125;p19"/>
           <p:cNvSpPr txBox="1"/>
           <p:nvPr/>
         </p:nvSpPr>
         <p:spPr>
           <a:xfrm>
-            <a:off x="592725" y="1423525"/>
+            <a:off x="592725" y="1599388"/>
             <a:ext cx="6185100" cy="507900"/>
           </a:xfrm>
           <a:prstGeom prst="rect">
@@ -8661,13 +8689,13 @@
       </p:sp>
       <p:sp>
         <p:nvSpPr>
-          <p:cNvPr id="125" name="Google Shape;125;p19"/>
+          <p:cNvPr id="126" name="Google Shape;126;p19"/>
           <p:cNvSpPr txBox="1"/>
           <p:nvPr/>
         </p:nvSpPr>
         <p:spPr>
           <a:xfrm>
-            <a:off x="592725" y="1931425"/>
+            <a:off x="592725" y="2156100"/>
             <a:ext cx="5412000" cy="831300"/>
           </a:xfrm>
           <a:prstGeom prst="rect">
@@ -8719,13 +8747,13 @@
       </p:sp>
       <p:sp>
         <p:nvSpPr>
-          <p:cNvPr id="126" name="Google Shape;126;p19"/>
+          <p:cNvPr id="127" name="Google Shape;127;p19"/>
           <p:cNvSpPr txBox="1"/>
           <p:nvPr/>
         </p:nvSpPr>
         <p:spPr>
           <a:xfrm>
-            <a:off x="592725" y="2710275"/>
+            <a:off x="592725" y="2987400"/>
             <a:ext cx="5089800" cy="800400"/>
           </a:xfrm>
           <a:prstGeom prst="rect">
@@ -8777,13 +8805,13 @@
       </p:sp>
       <p:sp>
         <p:nvSpPr>
-          <p:cNvPr id="127" name="Google Shape;127;p19"/>
+          <p:cNvPr id="128" name="Google Shape;128;p19"/>
           <p:cNvSpPr txBox="1"/>
           <p:nvPr/>
         </p:nvSpPr>
         <p:spPr>
           <a:xfrm>
-            <a:off x="592725" y="3510675"/>
+            <a:off x="592725" y="3811350"/>
             <a:ext cx="5807100" cy="492600"/>
           </a:xfrm>
           <a:prstGeom prst="rect">
@@ -8835,7 +8863,7 @@
       </p:sp>
       <p:pic>
         <p:nvPicPr>
-          <p:cNvPr id="128" name="Google Shape;128;p19" title="₊⊹ Сильвашмеме ₊࿔.jpg"/>
+          <p:cNvPr id="129" name="Google Shape;129;p19" title="₊⊹ Сильвашмеме ₊࿔.jpg"/>
           <p:cNvPicPr preferRelativeResize="0"/>
           <p:nvPr/>
         </p:nvPicPr>
@@ -8849,7 +8877,7 @@
         </p:blipFill>
         <p:spPr>
           <a:xfrm>
-            <a:off x="5855175" y="1550575"/>
+            <a:off x="5876650" y="1582789"/>
             <a:ext cx="2817651" cy="2817651"/>
           </a:xfrm>
           <a:prstGeom prst="rect">
@@ -8863,7 +8891,7 @@
       </p:pic>
       <p:pic>
         <p:nvPicPr>
-          <p:cNvPr id="129" name="Google Shape;129;p19" title="загруженное (19).jpg"/>
+          <p:cNvPr id="130" name="Google Shape;130;p19" title="загруженное (19).jpg"/>
           <p:cNvPicPr preferRelativeResize="0"/>
           <p:nvPr/>
         </p:nvPicPr>
@@ -8902,7 +8930,7 @@
   <p:cSld>
     <p:spTree>
       <p:nvGrpSpPr>
-        <p:cNvPr id="133" name="Shape 133"/>
+        <p:cNvPr id="134" name="Shape 134"/>
         <p:cNvGrpSpPr/>
         <p:nvPr/>
       </p:nvGrpSpPr>
@@ -8916,7 +8944,7 @@
       </p:grpSpPr>
       <p:sp>
         <p:nvSpPr>
-          <p:cNvPr id="134" name="Google Shape;134;p20"/>
+          <p:cNvPr id="135" name="Google Shape;135;p20"/>
           <p:cNvSpPr txBox="1"/>
           <p:nvPr>
             <p:ph type="title"/>
@@ -8956,7 +8984,7 @@
       </p:sp>
       <p:sp>
         <p:nvSpPr>
-          <p:cNvPr id="135" name="Google Shape;135;p20"/>
+          <p:cNvPr id="136" name="Google Shape;136;p20"/>
           <p:cNvSpPr txBox="1"/>
           <p:nvPr>
             <p:ph idx="1" type="body"/>
@@ -9015,7 +9043,7 @@
       </p:sp>
       <p:pic>
         <p:nvPicPr>
-          <p:cNvPr id="136" name="Google Shape;136;p20" title="qrcod_eAum.png"/>
+          <p:cNvPr id="137" name="Google Shape;137;p20" title="qrcod_eAum.png"/>
           <p:cNvPicPr preferRelativeResize="0"/>
           <p:nvPr/>
         </p:nvPicPr>
@@ -9043,7 +9071,7 @@
       </p:pic>
       <p:pic>
         <p:nvPicPr>
-          <p:cNvPr id="137" name="Google Shape;137;p20" title="загруженное (20).jpg"/>
+          <p:cNvPr id="138" name="Google Shape;138;p20" title="загруженное (20).jpg"/>
           <p:cNvPicPr preferRelativeResize="0"/>
           <p:nvPr/>
         </p:nvPicPr>
@@ -9071,7 +9099,7 @@
       </p:pic>
       <p:pic>
         <p:nvPicPr>
-          <p:cNvPr id="138" name="Google Shape;138;p20" title="загруженное (21).jpg"/>
+          <p:cNvPr id="139" name="Google Shape;139;p20" title="загруженное (21).jpg"/>
           <p:cNvPicPr preferRelativeResize="0"/>
           <p:nvPr/>
         </p:nvPicPr>
@@ -9099,7 +9127,7 @@
       </p:pic>
       <p:pic>
         <p:nvPicPr>
-          <p:cNvPr id="139" name="Google Shape;139;p20" title="загруженное (1).gif"/>
+          <p:cNvPr id="140" name="Google Shape;140;p20" title="загруженное (1).gif"/>
           <p:cNvPicPr preferRelativeResize="0"/>
           <p:nvPr/>
         </p:nvPicPr>
@@ -9127,7 +9155,7 @@
       </p:pic>
       <p:pic>
         <p:nvPicPr>
-          <p:cNvPr id="140" name="Google Shape;140;p20" title="Отправляй всем.jpg"/>
+          <p:cNvPr id="141" name="Google Shape;141;p20" title="Отправляй всем.jpg"/>
           <p:cNvPicPr preferRelativeResize="0"/>
           <p:nvPr/>
         </p:nvPicPr>
@@ -9162,6 +9190,285 @@
 </file>
 
 <file path=ppt/theme/theme1.xml><?xml version="1.0" encoding="utf-8"?>
+<a:theme xmlns:a="http://schemas.openxmlformats.org/drawingml/2006/main" xmlns:r="http://schemas.openxmlformats.org/officeDocument/2006/relationships">
+  <a:themeElements>
+    <a:clrScheme name="Default">
+      <a:dk1>
+        <a:srgbClr val="000000"/>
+      </a:dk1>
+      <a:lt1>
+        <a:srgbClr val="FFFFFF"/>
+      </a:lt1>
+      <a:dk2>
+        <a:srgbClr val="158158"/>
+      </a:dk2>
+      <a:lt2>
+        <a:srgbClr val="F3F3F3"/>
+      </a:lt2>
+      <a:accent1>
+        <a:srgbClr val="058DC7"/>
+      </a:accent1>
+      <a:accent2>
+        <a:srgbClr val="50B432"/>
+      </a:accent2>
+      <a:accent3>
+        <a:srgbClr val="ED561B"/>
+      </a:accent3>
+      <a:accent4>
+        <a:srgbClr val="EDEF00"/>
+      </a:accent4>
+      <a:accent5>
+        <a:srgbClr val="24CBE5"/>
+      </a:accent5>
+      <a:accent6>
+        <a:srgbClr val="64E572"/>
+      </a:accent6>
+      <a:hlink>
+        <a:srgbClr val="2200CC"/>
+      </a:hlink>
+      <a:folHlink>
+        <a:srgbClr val="551A8B"/>
+      </a:folHlink>
+    </a:clrScheme>
+    <a:fontScheme name="Office">
+      <a:majorFont>
+        <a:latin typeface="Arial"/>
+        <a:ea typeface=""/>
+        <a:cs typeface=""/>
+        <a:font script="Jpan" typeface="ＭＳ Ｐゴシック"/>
+        <a:font script="Hang" typeface="맑은 고딕"/>
+        <a:font script="Hans" typeface="宋体"/>
+        <a:font script="Hant" typeface="新細明體"/>
+        <a:font script="Arab" typeface="Times New Roman"/>
+        <a:font script="Hebr" typeface="Times New Roman"/>
+        <a:font script="Thai" typeface="Angsana New"/>
+        <a:font script="Ethi" typeface="Nyala"/>
+        <a:font script="Beng" typeface="Vrinda"/>
+        <a:font script="Gujr" typeface="Shruti"/>
+        <a:font script="Khmr" typeface="MoolBoran"/>
+        <a:font script="Knda" typeface="Tunga"/>
+        <a:font script="Guru" typeface="Raavi"/>
+        <a:font script="Cans" typeface="Euphemia"/>
+        <a:font script="Cher" typeface="Plantagenet Cherokee"/>
+        <a:font script="Yiii" typeface="Microsoft Yi Baiti"/>
+        <a:font script="Tibt" typeface="Microsoft Himalaya"/>
+        <a:font script="Thaa" typeface="MV Boli"/>
+        <a:font script="Deva" typeface="Mangal"/>
+        <a:font script="Telu" typeface="Gautami"/>
+        <a:font script="Taml" typeface="Latha"/>
+        <a:font script="Syrc" typeface="Estrangelo Edessa"/>
+        <a:font script="Orya" typeface="Kalinga"/>
+        <a:font script="Mlym" typeface="Kartika"/>
+        <a:font script="Laoo" typeface="DokChampa"/>
+        <a:font script="Sinh" typeface="Iskoola Pota"/>
+        <a:font script="Mong" typeface="Mongolian Baiti"/>
+        <a:font script="Viet" typeface="Times New Roman"/>
+        <a:font script="Uigh" typeface="Microsoft Uighur"/>
+        <a:font script="Geor" typeface="Sylfaen"/>
+      </a:majorFont>
+      <a:minorFont>
+        <a:latin typeface="Arial"/>
+        <a:ea typeface=""/>
+        <a:cs typeface=""/>
+        <a:font script="Jpan" typeface="ＭＳ Ｐゴシック"/>
+        <a:font script="Hang" typeface="맑은 고딕"/>
+        <a:font script="Hans" typeface="宋体"/>
+        <a:font script="Hant" typeface="新細明體"/>
+        <a:font script="Arab" typeface="Arial"/>
+        <a:font script="Hebr" typeface="Arial"/>
+        <a:font script="Thai" typeface="Cordia New"/>
+        <a:font script="Ethi" typeface="Nyala"/>
+        <a:font script="Beng" typeface="Vrinda"/>
+        <a:font script="Gujr" typeface="Shruti"/>
+        <a:font script="Khmr" typeface="DaunPenh"/>
+        <a:font script="Knda" typeface="Tunga"/>
+        <a:font script="Guru" typeface="Raavi"/>
+        <a:font script="Cans" typeface="Euphemia"/>
+        <a:font script="Cher" typeface="Plantagenet Cherokee"/>
+        <a:font script="Yiii" typeface="Microsoft Yi Baiti"/>
+        <a:font script="Tibt" typeface="Microsoft Himalaya"/>
+        <a:font script="Thaa" typeface="MV Boli"/>
+        <a:font script="Deva" typeface="Mangal"/>
+        <a:font script="Telu" typeface="Gautami"/>
+        <a:font script="Taml" typeface="Latha"/>
+        <a:font script="Syrc" typeface="Estrangelo Edessa"/>
+        <a:font script="Orya" typeface="Kalinga"/>
+        <a:font script="Mlym" typeface="Kartika"/>
+        <a:font script="Laoo" typeface="DokChampa"/>
+        <a:font script="Sinh" typeface="Iskoola Pota"/>
+        <a:font script="Mong" typeface="Mongolian Baiti"/>
+        <a:font script="Viet" typeface="Arial"/>
+        <a:font script="Uigh" typeface="Microsoft Uighur"/>
+        <a:font script="Geor" typeface="Sylfaen"/>
+      </a:minorFont>
+    </a:fontScheme>
+    <a:fmtScheme name="Office">
+      <a:fillStyleLst>
+        <a:solidFill>
+          <a:schemeClr val="phClr"/>
+        </a:solidFill>
+        <a:gradFill rotWithShape="1">
+          <a:gsLst>
+            <a:gs pos="0">
+              <a:schemeClr val="phClr">
+                <a:tint val="50000"/>
+                <a:satMod val="300000"/>
+              </a:schemeClr>
+            </a:gs>
+            <a:gs pos="35000">
+              <a:schemeClr val="phClr">
+                <a:tint val="37000"/>
+                <a:satMod val="300000"/>
+              </a:schemeClr>
+            </a:gs>
+            <a:gs pos="100000">
+              <a:schemeClr val="phClr">
+                <a:tint val="15000"/>
+                <a:satMod val="350000"/>
+              </a:schemeClr>
+            </a:gs>
+          </a:gsLst>
+          <a:lin ang="16200000" scaled="1"/>
+        </a:gradFill>
+        <a:gradFill rotWithShape="1">
+          <a:gsLst>
+            <a:gs pos="0">
+              <a:schemeClr val="phClr">
+                <a:tint val="100000"/>
+                <a:shade val="100000"/>
+                <a:satMod val="130000"/>
+              </a:schemeClr>
+            </a:gs>
+            <a:gs pos="100000">
+              <a:schemeClr val="phClr">
+                <a:tint val="50000"/>
+                <a:shade val="100000"/>
+                <a:satMod val="350000"/>
+              </a:schemeClr>
+            </a:gs>
+          </a:gsLst>
+          <a:lin ang="16200000" scaled="0"/>
+        </a:gradFill>
+      </a:fillStyleLst>
+      <a:lnStyleLst>
+        <a:ln w="9525" cap="flat" cmpd="sng" algn="ctr">
+          <a:solidFill>
+            <a:schemeClr val="phClr">
+              <a:shade val="95000"/>
+              <a:satMod val="105000"/>
+            </a:schemeClr>
+          </a:solidFill>
+          <a:prstDash val="solid"/>
+        </a:ln>
+        <a:ln w="25400" cap="flat" cmpd="sng" algn="ctr">
+          <a:solidFill>
+            <a:schemeClr val="phClr"/>
+          </a:solidFill>
+          <a:prstDash val="solid"/>
+        </a:ln>
+        <a:ln w="38100" cap="flat" cmpd="sng" algn="ctr">
+          <a:solidFill>
+            <a:schemeClr val="phClr"/>
+          </a:solidFill>
+          <a:prstDash val="solid"/>
+        </a:ln>
+      </a:lnStyleLst>
+      <a:effectStyleLst>
+        <a:effectStyle>
+          <a:effectLst>
+            <a:outerShdw blurRad="40000" dist="20000" dir="5400000" rotWithShape="0">
+              <a:srgbClr val="000000">
+                <a:alpha val="38000"/>
+              </a:srgbClr>
+            </a:outerShdw>
+          </a:effectLst>
+        </a:effectStyle>
+        <a:effectStyle>
+          <a:effectLst>
+            <a:outerShdw blurRad="40000" dist="23000" dir="5400000" rotWithShape="0">
+              <a:srgbClr val="000000">
+                <a:alpha val="35000"/>
+              </a:srgbClr>
+            </a:outerShdw>
+          </a:effectLst>
+        </a:effectStyle>
+        <a:effectStyle>
+          <a:effectLst>
+            <a:outerShdw blurRad="40000" dist="23000" dir="5400000" rotWithShape="0">
+              <a:srgbClr val="000000">
+                <a:alpha val="35000"/>
+              </a:srgbClr>
+            </a:outerShdw>
+          </a:effectLst>
+          <a:scene3d>
+            <a:camera prst="orthographicFront">
+              <a:rot lat="0" lon="0" rev="0"/>
+            </a:camera>
+            <a:lightRig rig="threePt" dir="t">
+              <a:rot lat="0" lon="0" rev="1200000"/>
+            </a:lightRig>
+          </a:scene3d>
+          <a:sp3d>
+            <a:bevelT w="63500" h="25400"/>
+          </a:sp3d>
+        </a:effectStyle>
+      </a:effectStyleLst>
+      <a:bgFillStyleLst>
+        <a:solidFill>
+          <a:schemeClr val="phClr"/>
+        </a:solidFill>
+        <a:gradFill rotWithShape="1">
+          <a:gsLst>
+            <a:gs pos="0">
+              <a:schemeClr val="phClr">
+                <a:tint val="40000"/>
+                <a:satMod val="350000"/>
+              </a:schemeClr>
+            </a:gs>
+            <a:gs pos="40000">
+              <a:schemeClr val="phClr">
+                <a:tint val="45000"/>
+                <a:shade val="99000"/>
+                <a:satMod val="350000"/>
+              </a:schemeClr>
+            </a:gs>
+            <a:gs pos="100000">
+              <a:schemeClr val="phClr">
+                <a:shade val="20000"/>
+                <a:satMod val="255000"/>
+              </a:schemeClr>
+            </a:gs>
+          </a:gsLst>
+          <a:path path="circle">
+            <a:fillToRect l="50000" t="-80000" r="50000" b="180000"/>
+          </a:path>
+        </a:gradFill>
+        <a:gradFill rotWithShape="1">
+          <a:gsLst>
+            <a:gs pos="0">
+              <a:schemeClr val="phClr">
+                <a:tint val="80000"/>
+                <a:satMod val="300000"/>
+              </a:schemeClr>
+            </a:gs>
+            <a:gs pos="100000">
+              <a:schemeClr val="phClr">
+                <a:shade val="30000"/>
+                <a:satMod val="200000"/>
+              </a:schemeClr>
+            </a:gs>
+          </a:gsLst>
+          <a:path path="circle">
+            <a:fillToRect l="50000" t="50000" r="50000" b="50000"/>
+          </a:path>
+        </a:gradFill>
+      </a:bgFillStyleLst>
+    </a:fmtScheme>
+  </a:themeElements>
+</a:theme>
+</file>
+
+<file path=ppt/theme/theme2.xml><?xml version="1.0" encoding="utf-8"?>
 <a:theme xmlns:a="http://schemas.openxmlformats.org/drawingml/2006/main" xmlns:r="http://schemas.openxmlformats.org/officeDocument/2006/relationships" name="Slate">
   <a:themeElements>
     <a:clrScheme name="Slate">
@@ -9438,283 +9745,4 @@
     </a:fmtScheme>
   </a:themeElements>
 </a:theme>
-</file>
-
-<file path=ppt/theme/theme2.xml><?xml version="1.0" encoding="utf-8"?>
-<a:theme xmlns:a="http://schemas.openxmlformats.org/drawingml/2006/main" xmlns:r="http://schemas.openxmlformats.org/officeDocument/2006/relationships">
-  <a:themeElements>
-    <a:clrScheme name="Default">
-      <a:dk1>
-        <a:srgbClr val="000000"/>
-      </a:dk1>
-      <a:lt1>
-        <a:srgbClr val="FFFFFF"/>
-      </a:lt1>
-      <a:dk2>
-        <a:srgbClr val="158158"/>
-      </a:dk2>
-      <a:lt2>
-        <a:srgbClr val="F3F3F3"/>
-      </a:lt2>
-      <a:accent1>
-        <a:srgbClr val="058DC7"/>
-      </a:accent1>
-      <a:accent2>
-        <a:srgbClr val="50B432"/>
-      </a:accent2>
-      <a:accent3>
-        <a:srgbClr val="ED561B"/>
-      </a:accent3>
-      <a:accent4>
-        <a:srgbClr val="EDEF00"/>
-      </a:accent4>
-      <a:accent5>
-        <a:srgbClr val="24CBE5"/>
-      </a:accent5>
-      <a:accent6>
-        <a:srgbClr val="64E572"/>
-      </a:accent6>
-      <a:hlink>
-        <a:srgbClr val="2200CC"/>
-      </a:hlink>
-      <a:folHlink>
-        <a:srgbClr val="551A8B"/>
-      </a:folHlink>
-    </a:clrScheme>
-    <a:fontScheme name="Office">
-      <a:majorFont>
-        <a:latin typeface="Arial"/>
-        <a:ea typeface=""/>
-        <a:cs typeface=""/>
-        <a:font script="Jpan" typeface="ＭＳ Ｐゴシック"/>
-        <a:font script="Hang" typeface="맑은 고딕"/>
-        <a:font script="Hans" typeface="宋体"/>
-        <a:font script="Hant" typeface="新細明體"/>
-        <a:font script="Arab" typeface="Times New Roman"/>
-        <a:font script="Hebr" typeface="Times New Roman"/>
-        <a:font script="Thai" typeface="Angsana New"/>
-        <a:font script="Ethi" typeface="Nyala"/>
-        <a:font script="Beng" typeface="Vrinda"/>
-        <a:font script="Gujr" typeface="Shruti"/>
-        <a:font script="Khmr" typeface="MoolBoran"/>
-        <a:font script="Knda" typeface="Tunga"/>
-        <a:font script="Guru" typeface="Raavi"/>
-        <a:font script="Cans" typeface="Euphemia"/>
-        <a:font script="Cher" typeface="Plantagenet Cherokee"/>
-        <a:font script="Yiii" typeface="Microsoft Yi Baiti"/>
-        <a:font script="Tibt" typeface="Microsoft Himalaya"/>
-        <a:font script="Thaa" typeface="MV Boli"/>
-        <a:font script="Deva" typeface="Mangal"/>
-        <a:font script="Telu" typeface="Gautami"/>
-        <a:font script="Taml" typeface="Latha"/>
-        <a:font script="Syrc" typeface="Estrangelo Edessa"/>
-        <a:font script="Orya" typeface="Kalinga"/>
-        <a:font script="Mlym" typeface="Kartika"/>
-        <a:font script="Laoo" typeface="DokChampa"/>
-        <a:font script="Sinh" typeface="Iskoola Pota"/>
-        <a:font script="Mong" typeface="Mongolian Baiti"/>
-        <a:font script="Viet" typeface="Times New Roman"/>
-        <a:font script="Uigh" typeface="Microsoft Uighur"/>
-        <a:font script="Geor" typeface="Sylfaen"/>
-      </a:majorFont>
-      <a:minorFont>
-        <a:latin typeface="Arial"/>
-        <a:ea typeface=""/>
-        <a:cs typeface=""/>
-        <a:font script="Jpan" typeface="ＭＳ Ｐゴシック"/>
-        <a:font script="Hang" typeface="맑은 고딕"/>
-        <a:font script="Hans" typeface="宋体"/>
-        <a:font script="Hant" typeface="新細明體"/>
-        <a:font script="Arab" typeface="Arial"/>
-        <a:font script="Hebr" typeface="Arial"/>
-        <a:font script="Thai" typeface="Cordia New"/>
-        <a:font script="Ethi" typeface="Nyala"/>
-        <a:font script="Beng" typeface="Vrinda"/>
-        <a:font script="Gujr" typeface="Shruti"/>
-        <a:font script="Khmr" typeface="DaunPenh"/>
-        <a:font script="Knda" typeface="Tunga"/>
-        <a:font script="Guru" typeface="Raavi"/>
-        <a:font script="Cans" typeface="Euphemia"/>
-        <a:font script="Cher" typeface="Plantagenet Cherokee"/>
-        <a:font script="Yiii" typeface="Microsoft Yi Baiti"/>
-        <a:font script="Tibt" typeface="Microsoft Himalaya"/>
-        <a:font script="Thaa" typeface="MV Boli"/>
-        <a:font script="Deva" typeface="Mangal"/>
-        <a:font script="Telu" typeface="Gautami"/>
-        <a:font script="Taml" typeface="Latha"/>
-        <a:font script="Syrc" typeface="Estrangelo Edessa"/>
-        <a:font script="Orya" typeface="Kalinga"/>
-        <a:font script="Mlym" typeface="Kartika"/>
-        <a:font script="Laoo" typeface="DokChampa"/>
-        <a:font script="Sinh" typeface="Iskoola Pota"/>
-        <a:font script="Mong" typeface="Mongolian Baiti"/>
-        <a:font script="Viet" typeface="Arial"/>
-        <a:font script="Uigh" typeface="Microsoft Uighur"/>
-        <a:font script="Geor" typeface="Sylfaen"/>
-      </a:minorFont>
-    </a:fontScheme>
-    <a:fmtScheme name="Office">
-      <a:fillStyleLst>
-        <a:solidFill>
-          <a:schemeClr val="phClr"/>
-        </a:solidFill>
-        <a:gradFill rotWithShape="1">
-          <a:gsLst>
-            <a:gs pos="0">
-              <a:schemeClr val="phClr">
-                <a:tint val="50000"/>
-                <a:satMod val="300000"/>
-              </a:schemeClr>
-            </a:gs>
-            <a:gs pos="35000">
-              <a:schemeClr val="phClr">
-                <a:tint val="37000"/>
-                <a:satMod val="300000"/>
-              </a:schemeClr>
-            </a:gs>
-            <a:gs pos="100000">
-              <a:schemeClr val="phClr">
-                <a:tint val="15000"/>
-                <a:satMod val="350000"/>
-              </a:schemeClr>
-            </a:gs>
-          </a:gsLst>
-          <a:lin ang="16200000" scaled="1"/>
-        </a:gradFill>
-        <a:gradFill rotWithShape="1">
-          <a:gsLst>
-            <a:gs pos="0">
-              <a:schemeClr val="phClr">
-                <a:tint val="100000"/>
-                <a:shade val="100000"/>
-                <a:satMod val="130000"/>
-              </a:schemeClr>
-            </a:gs>
-            <a:gs pos="100000">
-              <a:schemeClr val="phClr">
-                <a:tint val="50000"/>
-                <a:shade val="100000"/>
-                <a:satMod val="350000"/>
-              </a:schemeClr>
-            </a:gs>
-          </a:gsLst>
-          <a:lin ang="16200000" scaled="0"/>
-        </a:gradFill>
-      </a:fillStyleLst>
-      <a:lnStyleLst>
-        <a:ln w="9525" cap="flat" cmpd="sng" algn="ctr">
-          <a:solidFill>
-            <a:schemeClr val="phClr">
-              <a:shade val="95000"/>
-              <a:satMod val="105000"/>
-            </a:schemeClr>
-          </a:solidFill>
-          <a:prstDash val="solid"/>
-        </a:ln>
-        <a:ln w="25400" cap="flat" cmpd="sng" algn="ctr">
-          <a:solidFill>
-            <a:schemeClr val="phClr"/>
-          </a:solidFill>
-          <a:prstDash val="solid"/>
-        </a:ln>
-        <a:ln w="38100" cap="flat" cmpd="sng" algn="ctr">
-          <a:solidFill>
-            <a:schemeClr val="phClr"/>
-          </a:solidFill>
-          <a:prstDash val="solid"/>
-        </a:ln>
-      </a:lnStyleLst>
-      <a:effectStyleLst>
-        <a:effectStyle>
-          <a:effectLst>
-            <a:outerShdw blurRad="40000" dist="20000" dir="5400000" rotWithShape="0">
-              <a:srgbClr val="000000">
-                <a:alpha val="38000"/>
-              </a:srgbClr>
-            </a:outerShdw>
-          </a:effectLst>
-        </a:effectStyle>
-        <a:effectStyle>
-          <a:effectLst>
-            <a:outerShdw blurRad="40000" dist="23000" dir="5400000" rotWithShape="0">
-              <a:srgbClr val="000000">
-                <a:alpha val="35000"/>
-              </a:srgbClr>
-            </a:outerShdw>
-          </a:effectLst>
-        </a:effectStyle>
-        <a:effectStyle>
-          <a:effectLst>
-            <a:outerShdw blurRad="40000" dist="23000" dir="5400000" rotWithShape="0">
-              <a:srgbClr val="000000">
-                <a:alpha val="35000"/>
-              </a:srgbClr>
-            </a:outerShdw>
-          </a:effectLst>
-          <a:scene3d>
-            <a:camera prst="orthographicFront">
-              <a:rot lat="0" lon="0" rev="0"/>
-            </a:camera>
-            <a:lightRig rig="threePt" dir="t">
-              <a:rot lat="0" lon="0" rev="1200000"/>
-            </a:lightRig>
-          </a:scene3d>
-          <a:sp3d>
-            <a:bevelT w="63500" h="25400"/>
-          </a:sp3d>
-        </a:effectStyle>
-      </a:effectStyleLst>
-      <a:bgFillStyleLst>
-        <a:solidFill>
-          <a:schemeClr val="phClr"/>
-        </a:solidFill>
-        <a:gradFill rotWithShape="1">
-          <a:gsLst>
-            <a:gs pos="0">
-              <a:schemeClr val="phClr">
-                <a:tint val="40000"/>
-                <a:satMod val="350000"/>
-              </a:schemeClr>
-            </a:gs>
-            <a:gs pos="40000">
-              <a:schemeClr val="phClr">
-                <a:tint val="45000"/>
-                <a:shade val="99000"/>
-                <a:satMod val="350000"/>
-              </a:schemeClr>
-            </a:gs>
-            <a:gs pos="100000">
-              <a:schemeClr val="phClr">
-                <a:shade val="20000"/>
-                <a:satMod val="255000"/>
-              </a:schemeClr>
-            </a:gs>
-          </a:gsLst>
-          <a:path path="circle">
-            <a:fillToRect l="50000" t="-80000" r="50000" b="180000"/>
-          </a:path>
-        </a:gradFill>
-        <a:gradFill rotWithShape="1">
-          <a:gsLst>
-            <a:gs pos="0">
-              <a:schemeClr val="phClr">
-                <a:tint val="80000"/>
-                <a:satMod val="300000"/>
-              </a:schemeClr>
-            </a:gs>
-            <a:gs pos="100000">
-              <a:schemeClr val="phClr">
-                <a:shade val="30000"/>
-                <a:satMod val="200000"/>
-              </a:schemeClr>
-            </a:gs>
-          </a:gsLst>
-          <a:path path="circle">
-            <a:fillToRect l="50000" t="50000" r="50000" b="50000"/>
-          </a:path>
-        </a:gradFill>
-      </a:bgFillStyleLst>
-    </a:fmtScheme>
-  </a:themeElements>
-</a:theme>
 </file>